--- a/README_activate_multiple_cores.pptx
+++ b/README_activate_multiple_cores.pptx
@@ -3510,7 +3510,7 @@
         <p:spPr>
           <a:xfrm>
             <a:off x="119565" y="132639"/>
-            <a:ext cx="3117257" cy="4524315"/>
+            <a:ext cx="3117257" cy="4770537"/>
           </a:xfrm>
           <a:prstGeom prst="rect">
             <a:avLst/>
@@ -3524,32 +3524,49 @@
           <a:lstStyle/>
           <a:p>
             <a:r>
-              <a:rPr lang="en-US" dirty="0"/>
+              <a:rPr lang="en-US" sz="1600" dirty="0"/>
               <a:t>We updated the engine to allow multiple cores to work on the model optimization in parallel.</a:t>
             </a:r>
           </a:p>
           <a:p>
-            <a:endParaRPr lang="en-US" dirty="0"/>
-          </a:p>
-          <a:p>
-            <a:r>
-              <a:rPr lang="en-US" dirty="0"/>
+            <a:endParaRPr lang="en-US" sz="1600" dirty="0"/>
+          </a:p>
+          <a:p>
+            <a:r>
+              <a:rPr lang="en-US" sz="1600" dirty="0"/>
               <a:t>This decreased runtime by approximately one order of magnitude.</a:t>
             </a:r>
           </a:p>
           <a:p>
-            <a:endParaRPr lang="en-US" dirty="0"/>
-          </a:p>
-          <a:p>
-            <a:r>
-              <a:rPr lang="en-US" dirty="0"/>
+            <a:endParaRPr lang="en-US" sz="1600" dirty="0"/>
+          </a:p>
+          <a:p>
+            <a:r>
+              <a:rPr lang="en-US" sz="1600" dirty="0"/>
               <a:t>To activate multiple cores, click on the four bars on the bottom left and select “Parallel Preferences”.</a:t>
             </a:r>
           </a:p>
           <a:p>
             <a:r>
-              <a:rPr lang="en-US" dirty="0"/>
+              <a:rPr lang="en-US" sz="1600" dirty="0"/>
               <a:t>Then activate as many parallel pools as you prefer / want to spare.</a:t>
+            </a:r>
+          </a:p>
+          <a:p>
+            <a:endParaRPr lang="en-US" sz="1600" dirty="0"/>
+          </a:p>
+          <a:p>
+            <a:r>
+              <a:rPr lang="en-US" sz="1600" dirty="0"/>
+              <a:t>The procedure has been validate against the previous settings and showed the same parameter </a:t>
+            </a:r>
+            <a:r>
+              <a:rPr lang="en-US" sz="1600"/>
+              <a:t>space explorer results </a:t>
+            </a:r>
+            <a:r>
+              <a:rPr lang="en-US" sz="1600" dirty="0"/>
+              <a:t>(but faster runtime).</a:t>
             </a:r>
           </a:p>
         </p:txBody>
